--- a/output/education/2026-03-26_ai-medical-education-integrated/ai-medical-education-integrated_slides_residents.pptx
+++ b/output/education/2026-03-26_ai-medical-education-integrated/ai-medical-education-integrated_slides_residents.pptx
@@ -3142,6 +3142,7 @@
               </a:defRPr>
             </a:pPr>
             <a:r>
+              <a:rPr/>
               <a:t>AI時代の臨床推論 — 使いこなす力と疑う力</a:t>
             </a:r>
           </a:p>
@@ -3178,6 +3179,7 @@
               </a:defRPr>
             </a:pPr>
             <a:r>
+              <a:rPr/>
               <a:t>対象: 研修医・専攻医</a:t>
             </a:r>
           </a:p>
@@ -3214,6 +3216,7 @@
               </a:defRPr>
             </a:pPr>
             <a:r>
+              <a:rPr/>
               <a:t>時間: 45分</a:t>
             </a:r>
           </a:p>
@@ -3250,6 +3253,7 @@
               </a:defRPr>
             </a:pPr>
             <a:r>
+              <a:rPr/>
               <a:t>日付: 2026-03-26</a:t>
             </a:r>
           </a:p>
@@ -3263,7 +3267,7 @@
         </p:nvSpPr>
         <p:spPr>
           <a:xfrm>
-            <a:off x="548640" y="1783080"/>
+            <a:off x="548640" y="1801368"/>
             <a:ext cx="7772400" cy="320040"/>
           </a:xfrm>
           <a:prstGeom prst="rect">
@@ -3286,6 +3290,7 @@
               </a:defRPr>
             </a:pPr>
             <a:r>
+              <a:rPr/>
               <a:t>IDモデル: ガニェの9教授事象</a:t>
             </a:r>
           </a:p>
@@ -3299,7 +3304,7 @@
         </p:nvSpPr>
         <p:spPr>
           <a:xfrm>
-            <a:off x="548640" y="2103120"/>
+            <a:off x="548640" y="2139696"/>
             <a:ext cx="7772400" cy="320040"/>
           </a:xfrm>
           <a:prstGeom prst="rect">
@@ -3322,6 +3327,7 @@
               </a:defRPr>
             </a:pPr>
             <a:r>
+              <a:rPr/>
               <a:t>ブルーム: 理解 → 分析 → 評価 → 創造</a:t>
             </a:r>
           </a:p>
@@ -3384,6 +3390,7 @@
               </a:defRPr>
             </a:pPr>
             <a:r>
+              <a:rPr/>
               <a:t>Slide 9: ハンズオン体験（22-28分）</a:t>
             </a:r>
           </a:p>
@@ -3420,6 +3427,7 @@
               </a:defRPr>
             </a:pPr>
             <a:r>
+              <a:rPr/>
               <a:t>症例: 45歳女性、2週間前からの倦怠感と微熱</a:t>
             </a:r>
           </a:p>
@@ -3434,7 +3442,7 @@
         <p:spPr>
           <a:xfrm>
             <a:off x="548640" y="1143000"/>
-            <a:ext cx="7772400" cy="320040"/>
+            <a:ext cx="7772400" cy="322579"/>
           </a:xfrm>
           <a:prstGeom prst="rect">
             <a:avLst/>
@@ -3456,6 +3464,7 @@
               </a:defRPr>
             </a:pPr>
             <a:r>
+              <a:rPr/>
               <a:t>手順:</a:t>
             </a:r>
           </a:p>
@@ -3493,6 +3502,7 @@
               <a:buChar char="●"/>
             </a:pPr>
             <a:r>
+              <a:rPr/>
               <a:t>Aさん（2分）: ChatGPT/Claudeに「患者役」をさせて問診する</a:t>
             </a:r>
           </a:p>
@@ -3507,6 +3517,7 @@
               <a:buChar char="●"/>
             </a:pPr>
             <a:r>
+              <a:rPr/>
               <a:t>Bさん（2分）: AIを「ソクラテス的ガイド」として使い、自分の鑑別診断を検証する</a:t>
             </a:r>
           </a:p>
@@ -3521,6 +3532,7 @@
               <a:buChar char="●"/>
             </a:pPr>
             <a:r>
+              <a:rPr/>
               <a:t>比較（2分）: 体験を比較 — どちらが「考えさせられた」か？</a:t>
             </a:r>
           </a:p>
@@ -3535,7 +3547,7 @@
         <p:spPr>
           <a:xfrm>
             <a:off x="548640" y="2514600"/>
-            <a:ext cx="7772400" cy="320040"/>
+            <a:ext cx="7772400" cy="322579"/>
           </a:xfrm>
           <a:prstGeom prst="rect">
             <a:avLst/>
@@ -3557,6 +3569,7 @@
               </a:defRPr>
             </a:pPr>
             <a:r>
+              <a:rPr/>
               <a:t>プロンプト例（患者役）:</a:t>
             </a:r>
           </a:p>
@@ -3601,7 +3614,9 @@
           <a:bodyPr rtlCol="0" anchor="ctr"/>
           <a:lstStyle/>
           <a:p>
-            <a:pPr algn="ctr"/>
+            <a:pPr algn="ctr">
+              <a:defRPr/>
+            </a:pPr>
           </a:p>
         </p:txBody>
       </p:sp>
@@ -3646,7 +3661,9 @@
           <a:bodyPr rtlCol="0" anchor="ctr"/>
           <a:lstStyle/>
           <a:p>
-            <a:pPr algn="ctr"/>
+            <a:pPr algn="ctr">
+              <a:defRPr/>
+            </a:pPr>
           </a:p>
         </p:txBody>
       </p:sp>
@@ -3681,14 +3698,17 @@
               </a:defRPr>
             </a:pPr>
             <a:r>
+              <a:rPr/>
               <a:t>あなたは45歳女性の患者です。2週間前からの倦怠感と微熱で</a:t>
             </a:r>
             <a:br/>
             <a:r>
+              <a:rPr/>
               <a:t>受診しました。医学生の問診練習に協力してください。</a:t>
             </a:r>
             <a:br/>
             <a:r>
+              <a:rPr/>
               <a:t>質問されるまで情報を出さないでください。</a:t>
             </a:r>
           </a:p>
@@ -3703,7 +3723,7 @@
         <p:spPr>
           <a:xfrm>
             <a:off x="548640" y="3674668"/>
-            <a:ext cx="7772400" cy="320040"/>
+            <a:ext cx="7772400" cy="322579"/>
           </a:xfrm>
           <a:prstGeom prst="rect">
             <a:avLst/>
@@ -3725,6 +3745,7 @@
               </a:defRPr>
             </a:pPr>
             <a:r>
+              <a:rPr/>
               <a:t>プロンプト例（ソクラテス的ガイド）:</a:t>
             </a:r>
           </a:p>
@@ -3769,7 +3790,9 @@
           <a:bodyPr rtlCol="0" anchor="ctr"/>
           <a:lstStyle/>
           <a:p>
-            <a:pPr algn="ctr"/>
+            <a:pPr algn="ctr">
+              <a:defRPr/>
+            </a:pPr>
           </a:p>
         </p:txBody>
       </p:sp>
@@ -3814,7 +3837,9 @@
           <a:bodyPr rtlCol="0" anchor="ctr"/>
           <a:lstStyle/>
           <a:p>
-            <a:pPr algn="ctr"/>
+            <a:pPr algn="ctr">
+              <a:defRPr/>
+            </a:pPr>
           </a:p>
         </p:txBody>
       </p:sp>
@@ -3849,14 +3874,17 @@
               </a:defRPr>
             </a:pPr>
             <a:r>
+              <a:rPr/>
               <a:t>私は研修医です。45歳女性、倦怠感と微熱の患者を診ています。</a:t>
             </a:r>
             <a:br/>
             <a:r>
+              <a:rPr/>
               <a:t>私の鑑別診断に対して、見落としている可能性を</a:t>
             </a:r>
             <a:br/>
             <a:r>
+              <a:rPr/>
               <a:t>ソクラテス的に問いかけてください。答えは教えないでください。</a:t>
             </a:r>
           </a:p>
@@ -3919,6 +3947,7 @@
               </a:defRPr>
             </a:pPr>
             <a:r>
+              <a:rPr/>
               <a:t>Slide 10: 「疑う力」— AI仮想患者の構造的限界（28-31分）</a:t>
             </a:r>
           </a:p>
@@ -4357,7 +4386,9 @@
           <a:bodyPr rtlCol="0" anchor="ctr"/>
           <a:lstStyle/>
           <a:p>
-            <a:pPr algn="ctr"/>
+            <a:pPr algn="ctr">
+              <a:defRPr/>
+            </a:pPr>
           </a:p>
         </p:txBody>
       </p:sp>
@@ -4402,7 +4433,9 @@
           <a:bodyPr rtlCol="0" anchor="ctr"/>
           <a:lstStyle/>
           <a:p>
-            <a:pPr algn="ctr"/>
+            <a:pPr algn="ctr">
+              <a:defRPr/>
+            </a:pPr>
           </a:p>
         </p:txBody>
       </p:sp>
@@ -4437,22 +4470,27 @@
               </a:defRPr>
             </a:pPr>
             <a:r>
+              <a:rPr/>
               <a:t>Stage 1          Stage 2          Stage 3       Stage 4</a:t>
             </a:r>
             <a:br/>
             <a:r>
+              <a:rPr/>
               <a:t>安定・恒常性  →  創発・適応  →  カオス  →  不連続的変容</a:t>
             </a:r>
             <a:br/>
             <a:r>
+              <a:rPr/>
               <a:t>━━━━━━━━━      ━━━━━━━━━      ━━━━━━      ━━━━━━━━━━━</a:t>
             </a:r>
             <a:br/>
             <a:r>
+              <a:rPr/>
               <a:t>予測可能        パターンが       予測不能     根本的な</a:t>
             </a:r>
             <a:br/>
             <a:r>
+              <a:rPr/>
               <a:t>ルールベース    動的に変化       非線形       パラダイム転換</a:t>
             </a:r>
           </a:p>
@@ -4687,6 +4725,7 @@
               </a:defRPr>
             </a:pPr>
             <a:r>
+              <a:rPr/>
               <a:t>Slide 11: 統合・使い分けマトリクス（31-34分）</a:t>
             </a:r>
           </a:p>
@@ -5641,7 +5680,9 @@
           <a:bodyPr rtlCol="0" anchor="ctr"/>
           <a:lstStyle/>
           <a:p>
-            <a:pPr algn="ctr"/>
+            <a:pPr algn="ctr">
+              <a:defRPr/>
+            </a:pPr>
           </a:p>
         </p:txBody>
       </p:sp>
@@ -5686,7 +5727,9 @@
           <a:bodyPr rtlCol="0" anchor="ctr"/>
           <a:lstStyle/>
           <a:p>
-            <a:pPr algn="ctr"/>
+            <a:pPr algn="ctr">
+              <a:defRPr/>
+            </a:pPr>
           </a:p>
         </p:txBody>
       </p:sp>
@@ -5721,10 +5764,12 @@
               </a:defRPr>
             </a:pPr>
             <a:r>
+              <a:rPr/>
               <a:t>原則1（使いこなす力）: Stage 1の課題にはAIを積極的に活用する。3つの役割（Coach/Guide/Red Team）で使う。</a:t>
             </a:r>
             <a:br/>
             <a:r>
+              <a:rPr/>
               <a:t>原則2（疑う力）: Stage 2以降の課題では、AIの出力を批判的に読む。特に「何もしない」という推奨には要警戒。</a:t>
             </a:r>
           </a:p>
@@ -5787,6 +5832,7 @@
               </a:defRPr>
             </a:pPr>
             <a:r>
+              <a:rPr/>
               <a:t>Slide 12: ディスカッション（34-40分）</a:t>
             </a:r>
           </a:p>
@@ -5801,7 +5847,7 @@
         <p:spPr>
           <a:xfrm>
             <a:off x="548640" y="822960"/>
-            <a:ext cx="7772400" cy="320040"/>
+            <a:ext cx="7772400" cy="322579"/>
           </a:xfrm>
           <a:prstGeom prst="rect">
             <a:avLst/>
@@ -5823,6 +5869,7 @@
               </a:defRPr>
             </a:pPr>
             <a:r>
+              <a:rPr/>
               <a:t>問い（1つ選んでください）:</a:t>
             </a:r>
           </a:p>
@@ -5860,6 +5907,7 @@
               <a:buChar char="●"/>
             </a:pPr>
             <a:r>
+              <a:rPr/>
               <a:t>体験の振り返り: ハンズオンで「患者役AI」「ソクラテス的ガイドAI」「Red Team AI」のうち、どれが最も学びになりましたか？ なぜ？</a:t>
             </a:r>
           </a:p>
@@ -5897,6 +5945,7 @@
               <a:buChar char="●"/>
             </a:pPr>
             <a:r>
+              <a:rPr/>
               <a:t>PNAS研究の臨床的含意: AIが「何もしない」を過度に推奨する（不作為バイアス）ことは、あなたの臨床でどんな場面で問題になりそうですか？</a:t>
             </a:r>
           </a:p>
@@ -5934,6 +5983,7 @@
               <a:buChar char="●"/>
             </a:pPr>
             <a:r>
+              <a:rPr/>
               <a:t>未来の研修像: 80%超の医師がAIを使う時代に、研修医教育はどう変わるべきですか？「AIリテラシー」はOSCEに入れるべき？</a:t>
             </a:r>
           </a:p>
@@ -5996,6 +6046,7 @@
               </a:defRPr>
             </a:pPr>
             <a:r>
+              <a:rPr/>
               <a:t>Slide 13: 振り返りとアクション（40-45分）</a:t>
             </a:r>
           </a:p>
@@ -6010,7 +6061,7 @@
         <p:spPr>
           <a:xfrm>
             <a:off x="548640" y="822960"/>
-            <a:ext cx="7772400" cy="320040"/>
+            <a:ext cx="7772400" cy="322579"/>
           </a:xfrm>
           <a:prstGeom prst="rect">
             <a:avLst/>
@@ -6032,6 +6083,7 @@
               </a:defRPr>
             </a:pPr>
             <a:r>
+              <a:rPr/>
               <a:t>1. 世界は「使うかどうか」から「どう教育に組み込むか」へ</a:t>
             </a:r>
           </a:p>
@@ -6069,6 +6121,7 @@
               <a:buChar char="●"/>
             </a:pPr>
             <a:r>
+              <a:rPr/>
               <a:t>80%超の医師がAI活用（IME 2026）</a:t>
             </a:r>
           </a:p>
@@ -6083,6 +6136,7 @@
               <a:buChar char="●"/>
             </a:pPr>
             <a:r>
+              <a:rPr/>
               <a:t>マルチエージェントAIが臨床実装段階（Mount Sinai, BJC Healthcare）</a:t>
             </a:r>
           </a:p>
@@ -6097,7 +6151,7 @@
         <p:spPr>
           <a:xfrm>
             <a:off x="548640" y="1920240"/>
-            <a:ext cx="7772400" cy="320040"/>
+            <a:ext cx="7772400" cy="322579"/>
           </a:xfrm>
           <a:prstGeom prst="rect">
             <a:avLst/>
@@ -6119,6 +6173,7 @@
               </a:defRPr>
             </a:pPr>
             <a:r>
+              <a:rPr/>
               <a:t>2. AIは答えを出す道具ではなく、問いを立てる鏡</a:t>
             </a:r>
           </a:p>
@@ -6156,6 +6211,7 @@
               <a:buChar char="●"/>
             </a:pPr>
             <a:r>
+              <a:rPr/>
               <a:t>受動的に使うとバイアスを二重増幅する（Frontiers + PNAS）</a:t>
             </a:r>
           </a:p>
@@ -6170,6 +6226,7 @@
               <a:buChar char="●"/>
             </a:pPr>
             <a:r>
+              <a:rPr/>
               <a:t>3つの役割（Coach/Guide/Red Team）で能動的に使う</a:t>
             </a:r>
           </a:p>
@@ -6184,7 +6241,7 @@
         <p:spPr>
           <a:xfrm>
             <a:off x="548640" y="3017520"/>
-            <a:ext cx="7772400" cy="320040"/>
+            <a:ext cx="7772400" cy="322579"/>
           </a:xfrm>
           <a:prstGeom prst="rect">
             <a:avLst/>
@@ -6206,6 +6263,7 @@
               </a:defRPr>
             </a:pPr>
             <a:r>
+              <a:rPr/>
               <a:t>3. AIの限界を知ることが、これからの医師の必須能力</a:t>
             </a:r>
           </a:p>
@@ -6243,6 +6301,7 @@
               <a:buChar char="●"/>
             </a:pPr>
             <a:r>
+              <a:rPr/>
               <a:t>不作為バイアス、フレーミング効果はAIにも存在する（PNAS 2026）</a:t>
             </a:r>
           </a:p>
@@ -6257,6 +6316,7 @@
               <a:buChar char="●"/>
             </a:pPr>
             <a:r>
+              <a:rPr/>
               <a:t>機能的忠実度は高いが、会話的忠実度は低い（JMIR 2026）</a:t>
             </a:r>
           </a:p>
@@ -6271,6 +6331,7 @@
               <a:buChar char="●"/>
             </a:pPr>
             <a:r>
+              <a:rPr/>
               <a:t>Stage 2以降の複雑さは、現在のAIの限界の先にある</a:t>
             </a:r>
           </a:p>
@@ -6285,7 +6346,7 @@
         <p:spPr>
           <a:xfrm>
             <a:off x="548640" y="4389120"/>
-            <a:ext cx="7772400" cy="182880"/>
+            <a:ext cx="7772400" cy="304799"/>
           </a:xfrm>
           <a:prstGeom prst="rect">
             <a:avLst/>
@@ -6308,6 +6369,7 @@
               <a:buChar char="●"/>
             </a:pPr>
             <a:r>
+              <a:rPr/>
               <a:t>[ ] 明日の外来で、AIに「ソクラテス的ガイド」として1回聞いてみる</a:t>
             </a:r>
           </a:p>
@@ -6322,6 +6384,7 @@
               <a:buChar char="●"/>
             </a:pPr>
             <a:r>
+              <a:rPr/>
               <a:t>[ ] 同僚と「AIを使って失敗した体験」を1つ共有する</a:t>
             </a:r>
           </a:p>
@@ -6336,6 +6399,7 @@
               <a:buChar char="●"/>
             </a:pPr>
             <a:r>
+              <a:rPr/>
               <a:t>[ ] Mount Sinai論文またはPNAS論文のAbstractを1本読む</a:t>
             </a:r>
           </a:p>
@@ -6350,6 +6414,7 @@
               <a:buChar char="●"/>
             </a:pPr>
             <a:r>
+              <a:rPr/>
               <a:t>[ ] 自分の業務で「AIに任せたい業務」と「AIに任せたくない業務」を書き出す</a:t>
             </a:r>
           </a:p>
@@ -6412,6 +6477,7 @@
               </a:defRPr>
             </a:pPr>
             <a:r>
+              <a:rPr/>
               <a:t>Slide 14: 参考文献</a:t>
             </a:r>
           </a:p>
@@ -6449,6 +6515,7 @@
               <a:buChar char="●"/>
             </a:pPr>
             <a:r>
+              <a:rPr/>
               <a:t>Mount Sinai (2026) — Orchestrated Multi-Agent AI Systems Outperform Single Agents in Health Care. npj Health Systems.</a:t>
             </a:r>
           </a:p>
@@ -6486,6 +6553,7 @@
               <a:buChar char="●"/>
             </a:pPr>
             <a:r>
+              <a:rPr/>
               <a:t>Frontiers in Digital Health (2025) — Transforming Clinical Reasoning: The Role of AI in Supporting Human Cognitive Limitations.</a:t>
             </a:r>
           </a:p>
@@ -6523,6 +6591,7 @@
               <a:buChar char="●"/>
             </a:pPr>
             <a:r>
+              <a:rPr/>
               <a:t>PNAS (2026) — LLMs Amplify Cognitive Biases in Moral Decision-Making.</a:t>
             </a:r>
           </a:p>
@@ -6560,6 +6629,7 @@
               <a:buChar char="●"/>
             </a:pPr>
             <a:r>
+              <a:rPr/>
               <a:t>JMIR Formative Research (2026/3) — Scaling Multimodal Agentic AI in Medical Education: Multisite Cross-Sectional Study.</a:t>
             </a:r>
           </a:p>
@@ -6597,6 +6667,7 @@
               <a:buChar char="●"/>
             </a:pPr>
             <a:r>
+              <a:rPr/>
               <a:t>JMIR Medical Informatics (2026) — LLM-Based Virtual Patient Systems: Comprehensive Systematic Review.</a:t>
             </a:r>
           </a:p>
@@ -6634,6 +6705,7 @@
               <a:buChar char="●"/>
             </a:pPr>
             <a:r>
+              <a:rPr/>
               <a:t>npj Digital Medicine (2026) — Anchoring Bias in Clinical LLMs.</a:t>
             </a:r>
           </a:p>
@@ -6671,6 +6743,7 @@
               <a:buChar char="●"/>
             </a:pPr>
             <a:r>
+              <a:rPr/>
               <a:t>IME 2026 — Innovations in Medical Education Conference, University of Miami.</a:t>
             </a:r>
           </a:p>
@@ -6708,6 +6781,7 @@
               <a:buChar char="●"/>
             </a:pPr>
             <a:r>
+              <a:rPr/>
               <a:t>AMA — Boost Health AI Training Across Medical Education Continuum.</a:t>
             </a:r>
           </a:p>
@@ -6722,7 +6796,7 @@
         <p:spPr>
           <a:xfrm>
             <a:off x="548640" y="4480560"/>
-            <a:ext cx="7772400" cy="91439"/>
+            <a:ext cx="7772400" cy="304799"/>
           </a:xfrm>
           <a:prstGeom prst="rect">
             <a:avLst/>
@@ -6745,6 +6819,7 @@
               <a:buChar char="●"/>
             </a:pPr>
             <a:r>
+              <a:rPr/>
               <a:t>HIMSS26 — Multi-AI Agents for Clinical Decision Support (BJC Healthcare).</a:t>
             </a:r>
           </a:p>
@@ -6807,6 +6882,7 @@
               </a:defRPr>
             </a:pPr>
             <a:r>
+              <a:rPr/>
               <a:t>Generated by Scribe Agent | Learning Design Lab | 2026-03-26</a:t>
             </a:r>
           </a:p>
@@ -6843,6 +6919,7 @@
               </a:defRPr>
             </a:pPr>
             <a:r>
+              <a:rPr/>
               <a:t>Integrated from: 2026-03-21 Multi-Agent AI, 2026-03-25 AI Clinical Reasoning, 2026-03-26 Briefing</a:t>
             </a:r>
           </a:p>
@@ -6905,6 +6982,7 @@
               </a:defRPr>
             </a:pPr>
             <a:r>
+              <a:rPr/>
               <a:t>Slide 1: 世界はもうこのフェーズにいる（0-3分）</a:t>
             </a:r>
           </a:p>
@@ -6949,7 +7027,9 @@
           <a:bodyPr rtlCol="0" anchor="ctr"/>
           <a:lstStyle/>
           <a:p>
-            <a:pPr algn="ctr"/>
+            <a:pPr algn="ctr">
+              <a:defRPr/>
+            </a:pPr>
           </a:p>
         </p:txBody>
       </p:sp>
@@ -6994,7 +7074,9 @@
           <a:bodyPr rtlCol="0" anchor="ctr"/>
           <a:lstStyle/>
           <a:p>
-            <a:pPr algn="ctr"/>
+            <a:pPr algn="ctr">
+              <a:defRPr/>
+            </a:pPr>
           </a:p>
         </p:txBody>
       </p:sp>
@@ -7029,14 +7111,17 @@
               </a:defRPr>
             </a:pPr>
             <a:r>
+              <a:rPr/>
               <a:t>80%超の医師がAIを臨床で活用している。</a:t>
             </a:r>
             <a:br/>
             <a:r>
+              <a:rPr/>
               <a:t>76%がAIで診療能力が向上したと実感。</a:t>
             </a:r>
             <a:br/>
             <a:r>
+              <a:rPr/>
               <a:t>— AMA調査 / IME 2026（マイアミ大学, 2026年3月）</a:t>
             </a:r>
           </a:p>
@@ -7073,6 +7158,7 @@
               </a:defRPr>
             </a:pPr>
             <a:r>
+              <a:rPr/>
               <a:t>しかし同時に——</a:t>
             </a:r>
           </a:p>
@@ -7117,7 +7203,9 @@
           <a:bodyPr rtlCol="0" anchor="ctr"/>
           <a:lstStyle/>
           <a:p>
-            <a:pPr algn="ctr"/>
+            <a:pPr algn="ctr">
+              <a:defRPr/>
+            </a:pPr>
           </a:p>
         </p:txBody>
       </p:sp>
@@ -7162,7 +7250,9 @@
           <a:bodyPr rtlCol="0" anchor="ctr"/>
           <a:lstStyle/>
           <a:p>
-            <a:pPr algn="ctr"/>
+            <a:pPr algn="ctr">
+              <a:defRPr/>
+            </a:pPr>
           </a:p>
         </p:txBody>
       </p:sp>
@@ -7197,22 +7287,27 @@
               </a:defRPr>
             </a:pPr>
             <a:r>
+              <a:rPr/>
               <a:t>AIを使った医師の診断精度は、AI単独より低かった。</a:t>
             </a:r>
             <a:br/>
             <a:r>
+              <a:rPr/>
               <a:t>GPT-4 単独: 90%</a:t>
             </a:r>
             <a:br/>
             <a:r>
+              <a:rPr/>
               <a:t>医師 + GPT-4: 76%</a:t>
             </a:r>
             <a:br/>
             <a:r>
+              <a:rPr/>
               <a:t>医師 単独: 74%</a:t>
             </a:r>
             <a:br/>
             <a:r>
+              <a:rPr/>
               <a:t>— Frontiers in Digital Health, 2025</a:t>
             </a:r>
           </a:p>
@@ -7249,6 +7344,7 @@
               </a:defRPr>
             </a:pPr>
             <a:r>
+              <a:rPr/>
               <a:t>問い: AIは味方か、それとも新しい罠か？</a:t>
             </a:r>
           </a:p>
@@ -7311,6 +7407,7 @@
               </a:defRPr>
             </a:pPr>
             <a:r>
+              <a:rPr/>
               <a:t>Slide 2: 今日の学習目標（3-4分）</a:t>
             </a:r>
           </a:p>
@@ -7347,6 +7444,7 @@
               </a:defRPr>
             </a:pPr>
             <a:r>
+              <a:rPr/>
               <a:t>この45分の後、あなたは:</a:t>
             </a:r>
           </a:p>
@@ -7384,6 +7482,7 @@
               <a:buChar char="●"/>
             </a:pPr>
             <a:r>
+              <a:rPr/>
               <a:t>説明できる — AIの3世代とマルチエージェントの基本概念（理解）</a:t>
             </a:r>
           </a:p>
@@ -7398,6 +7497,7 @@
               <a:buChar char="●"/>
             </a:pPr>
             <a:r>
+              <a:rPr/>
               <a:t>分析できる — AIが持つ認知バイアスの種類とメカニズム（分析）</a:t>
             </a:r>
           </a:p>
@@ -7412,6 +7512,7 @@
               <a:buChar char="●"/>
             </a:pPr>
             <a:r>
+              <a:rPr/>
               <a:t>判断できる — AIを使うべき場面と、使うと逆効果になる場面（評価）</a:t>
             </a:r>
           </a:p>
@@ -7426,6 +7527,7 @@
               <a:buChar char="●"/>
             </a:pPr>
             <a:r>
+              <a:rPr/>
               <a:t>提案できる — 自分の研修にAIをどう組み込むかの具体策（創造）</a:t>
             </a:r>
           </a:p>
@@ -7488,6 +7590,7 @@
               </a:defRPr>
             </a:pPr>
             <a:r>
+              <a:rPr/>
               <a:t>Slide 3: 前提確認 — あなたとAIの関係（4-6分）</a:t>
             </a:r>
           </a:p>
@@ -7525,6 +7628,7 @@
               <a:buChar char="●"/>
             </a:pPr>
             <a:r>
+              <a:rPr/>
               <a:t>AI（ChatGPTやClaudeなど）を臨床で使ったことがある人？</a:t>
             </a:r>
           </a:p>
@@ -7539,6 +7643,7 @@
               <a:buChar char="●"/>
             </a:pPr>
             <a:r>
+              <a:rPr/>
               <a:t>使ったとき、AIの答えに引きずられた経験がある人？</a:t>
             </a:r>
           </a:p>
@@ -7553,6 +7658,7 @@
               <a:buChar char="●"/>
             </a:pPr>
             <a:r>
+              <a:rPr/>
               <a:t>逆に「AIは間違っている」と確信して無視した経験がある人？</a:t>
             </a:r>
           </a:p>
@@ -7597,7 +7703,9 @@
           <a:bodyPr rtlCol="0" anchor="ctr"/>
           <a:lstStyle/>
           <a:p>
-            <a:pPr algn="ctr"/>
+            <a:pPr algn="ctr">
+              <a:defRPr/>
+            </a:pPr>
           </a:p>
         </p:txBody>
       </p:sp>
@@ -7642,7 +7750,9 @@
           <a:bodyPr rtlCol="0" anchor="ctr"/>
           <a:lstStyle/>
           <a:p>
-            <a:pPr algn="ctr"/>
+            <a:pPr algn="ctr">
+              <a:defRPr/>
+            </a:pPr>
           </a:p>
         </p:txBody>
       </p:sp>
@@ -7677,10 +7787,12 @@
               </a:defRPr>
             </a:pPr>
             <a:r>
+              <a:rPr/>
               <a:t>どちらの反応も認知バイアスの一種です。</a:t>
             </a:r>
             <a:br/>
             <a:r>
+              <a:rPr/>
               <a:t>今日はこの「引きずられる力」と「疑う力」の両方を扱います。</a:t>
             </a:r>
           </a:p>
@@ -7743,6 +7855,7 @@
               </a:defRPr>
             </a:pPr>
             <a:r>
+              <a:rPr/>
               <a:t>Slide 4: AIの進化全体像 — 3世代からマルチエージェントへ（6-10分）</a:t>
             </a:r>
           </a:p>
@@ -8184,7 +8297,9 @@
           <a:bodyPr rtlCol="0" anchor="ctr"/>
           <a:lstStyle/>
           <a:p>
-            <a:pPr algn="ctr"/>
+            <a:pPr algn="ctr">
+              <a:defRPr/>
+            </a:pPr>
           </a:p>
         </p:txBody>
       </p:sp>
@@ -8229,7 +8344,9 @@
           <a:bodyPr rtlCol="0" anchor="ctr"/>
           <a:lstStyle/>
           <a:p>
-            <a:pPr algn="ctr"/>
+            <a:pPr algn="ctr">
+              <a:defRPr/>
+            </a:pPr>
           </a:p>
         </p:txBody>
       </p:sp>
@@ -8264,22 +8381,27 @@
               </a:defRPr>
             </a:pPr>
             <a:r>
+              <a:rPr/>
               <a:t>  [Supervisor Agent]（総合医）</a:t>
             </a:r>
             <a:br/>
             <a:r>
+              <a:rPr/>
               <a:t>    ├── [Agent A]（検査データ専門）</a:t>
             </a:r>
             <a:br/>
             <a:r>
+              <a:rPr/>
               <a:t>    ├── [Agent B]（画像診断専門）</a:t>
             </a:r>
             <a:br/>
             <a:r>
+              <a:rPr/>
               <a:t>    ├── [Agent C]（薬剤相互作用専門）</a:t>
             </a:r>
             <a:br/>
             <a:r>
+              <a:rPr/>
               <a:t>    └── [Agent D]（ガイドライン照合専門）</a:t>
             </a:r>
           </a:p>
@@ -8518,6 +8640,7 @@
               </a:defRPr>
             </a:pPr>
             <a:r>
+              <a:rPr/>
               <a:t>Slide 5: 臨床実装の最前線 — BJC Healthcareの事例（10-12分）</a:t>
             </a:r>
           </a:p>
@@ -9214,7 +9337,9 @@
           <a:bodyPr rtlCol="0" anchor="ctr"/>
           <a:lstStyle/>
           <a:p>
-            <a:pPr algn="ctr"/>
+            <a:pPr algn="ctr">
+              <a:defRPr/>
+            </a:pPr>
           </a:p>
         </p:txBody>
       </p:sp>
@@ -9259,7 +9384,9 @@
           <a:bodyPr rtlCol="0" anchor="ctr"/>
           <a:lstStyle/>
           <a:p>
-            <a:pPr algn="ctr"/>
+            <a:pPr algn="ctr">
+              <a:defRPr/>
+            </a:pPr>
           </a:p>
         </p:txBody>
       </p:sp>
@@ -9272,7 +9399,7 @@
         <p:spPr>
           <a:xfrm>
             <a:off x="777240" y="4462272"/>
-            <a:ext cx="7406640" cy="36576"/>
+            <a:ext cx="7406640" cy="287020"/>
           </a:xfrm>
           <a:prstGeom prst="rect">
             <a:avLst/>
@@ -9294,6 +9421,7 @@
               </a:defRPr>
             </a:pPr>
             <a:r>
+              <a:rPr/>
               <a:t>「人間がすべてチェックしなくてもいいAI」は、医療でどこまで許されるか？</a:t>
             </a:r>
           </a:p>
@@ -9356,6 +9484,7 @@
               </a:defRPr>
             </a:pPr>
             <a:r>
+              <a:rPr/>
               <a:t>Slide 6: しかしAIにはバイアスがある（12-16分）</a:t>
             </a:r>
           </a:p>
@@ -9370,7 +9499,7 @@
         <p:spPr>
           <a:xfrm>
             <a:off x="548640" y="822960"/>
-            <a:ext cx="7772400" cy="320040"/>
+            <a:ext cx="7772400" cy="322579"/>
           </a:xfrm>
           <a:prstGeom prst="rect">
             <a:avLst/>
@@ -9392,6 +9521,7 @@
               </a:defRPr>
             </a:pPr>
             <a:r>
+              <a:rPr/>
               <a:t>1. アンカリングバイアス</a:t>
             </a:r>
           </a:p>
@@ -9428,6 +9558,7 @@
               </a:defRPr>
             </a:pPr>
             <a:r>
+              <a:rPr/>
               <a:t>最初に得た情報に固執し、後の情報を過小評価する</a:t>
             </a:r>
           </a:p>
@@ -9465,6 +9596,7 @@
               <a:buChar char="●"/>
             </a:pPr>
             <a:r>
+              <a:rPr/>
               <a:t>例: 「胸痛の30歳男性」→ 筋骨格系と決めつけ → 心筋炎を見逃す</a:t>
             </a:r>
           </a:p>
@@ -9479,7 +9611,7 @@
         <p:spPr>
           <a:xfrm>
             <a:off x="548640" y="1965960"/>
-            <a:ext cx="7772400" cy="320040"/>
+            <a:ext cx="7772400" cy="322579"/>
           </a:xfrm>
           <a:prstGeom prst="rect">
             <a:avLst/>
@@ -9501,6 +9633,7 @@
               </a:defRPr>
             </a:pPr>
             <a:r>
+              <a:rPr/>
               <a:t>2. プレマチュアクロージャー（早期閉鎖）</a:t>
             </a:r>
           </a:p>
@@ -9537,6 +9670,7 @@
               </a:defRPr>
             </a:pPr>
             <a:r>
+              <a:rPr/>
               <a:t>十分な情報収集前に診断を確定してしまう</a:t>
             </a:r>
           </a:p>
@@ -9574,6 +9708,7 @@
               <a:buChar char="●"/>
             </a:pPr>
             <a:r>
+              <a:rPr/>
               <a:t>例: 発熱+咳 → 「風邪でしょう」→ 肺炎を見逃す</a:t>
             </a:r>
           </a:p>
@@ -9588,7 +9723,7 @@
         <p:spPr>
           <a:xfrm>
             <a:off x="548640" y="3108960"/>
-            <a:ext cx="7772400" cy="320040"/>
+            <a:ext cx="7772400" cy="322579"/>
           </a:xfrm>
           <a:prstGeom prst="rect">
             <a:avLst/>
@@ -9610,6 +9745,7 @@
               </a:defRPr>
             </a:pPr>
             <a:r>
+              <a:rPr/>
               <a:t>3. 利用可能性ヒューリスティクス</a:t>
             </a:r>
           </a:p>
@@ -9646,6 +9782,7 @@
               </a:defRPr>
             </a:pPr>
             <a:r>
+              <a:rPr/>
               <a:t>最近経験した症例に引きずられる</a:t>
             </a:r>
           </a:p>
@@ -9659,7 +9796,7 @@
         </p:nvSpPr>
         <p:spPr>
           <a:xfrm>
-            <a:off x="548640" y="3794759"/>
+            <a:off x="548640" y="3813047"/>
             <a:ext cx="7772400" cy="365760"/>
           </a:xfrm>
           <a:prstGeom prst="rect">
@@ -9683,6 +9820,7 @@
               <a:buChar char="●"/>
             </a:pPr>
             <a:r>
+              <a:rPr/>
               <a:t>例: 先週コロナ患者を10人診た → 今日の発熱患者もコロナだろう</a:t>
             </a:r>
           </a:p>
@@ -9727,7 +9865,9 @@
           <a:bodyPr rtlCol="0" anchor="ctr"/>
           <a:lstStyle/>
           <a:p>
-            <a:pPr algn="ctr"/>
+            <a:pPr algn="ctr">
+              <a:defRPr/>
+            </a:pPr>
           </a:p>
         </p:txBody>
       </p:sp>
@@ -9772,7 +9912,9 @@
           <a:bodyPr rtlCol="0" anchor="ctr"/>
           <a:lstStyle/>
           <a:p>
-            <a:pPr algn="ctr"/>
+            <a:pPr algn="ctr">
+              <a:defRPr/>
+            </a:pPr>
           </a:p>
         </p:txBody>
       </p:sp>
@@ -9785,7 +9927,7 @@
         <p:spPr>
           <a:xfrm>
             <a:off x="777240" y="4325112"/>
-            <a:ext cx="7406640" cy="173736"/>
+            <a:ext cx="7406640" cy="287020"/>
           </a:xfrm>
           <a:prstGeom prst="rect">
             <a:avLst/>
@@ -9807,6 +9949,7 @@
               </a:defRPr>
             </a:pPr>
             <a:r>
+              <a:rPr/>
               <a:t>共通点: ワーキングメモリの制約（同時に4-5項目しか処理できない）が根本原因</a:t>
             </a:r>
           </a:p>
@@ -9869,6 +10012,7 @@
               </a:defRPr>
             </a:pPr>
             <a:r>
+              <a:rPr/>
               <a:t>Slide 7: 新発見 — AIそのものがバイアスを「増幅」する（16-19分）</a:t>
             </a:r>
           </a:p>
@@ -10424,6 +10568,7 @@
               <a:buChar char="●"/>
             </a:pPr>
             <a:r>
+              <a:rPr/>
               <a:t>終末期ケア: AIが「積極的治療介入しない」を過度に推奨する可能性</a:t>
             </a:r>
           </a:p>
@@ -10438,6 +10583,7 @@
               <a:buChar char="●"/>
             </a:pPr>
             <a:r>
+              <a:rPr/>
               <a:t>救急判断: 問診の聞き方（フレーミング）でAIの推奨が変わる</a:t>
             </a:r>
           </a:p>
@@ -10452,6 +10598,7 @@
               <a:buChar char="●"/>
             </a:pPr>
             <a:r>
+              <a:rPr/>
               <a:t>鑑別診断: 最初に提示した仮説にAIが引きずられる（アンカリング）</a:t>
             </a:r>
           </a:p>
@@ -10496,7 +10643,9 @@
           <a:bodyPr rtlCol="0" anchor="ctr"/>
           <a:lstStyle/>
           <a:p>
-            <a:pPr algn="ctr"/>
+            <a:pPr algn="ctr">
+              <a:defRPr/>
+            </a:pPr>
           </a:p>
         </p:txBody>
       </p:sp>
@@ -10541,7 +10690,9 @@
           <a:bodyPr rtlCol="0" anchor="ctr"/>
           <a:lstStyle/>
           <a:p>
-            <a:pPr algn="ctr"/>
+            <a:pPr algn="ctr">
+              <a:defRPr/>
+            </a:pPr>
           </a:p>
         </p:txBody>
       </p:sp>
@@ -10576,10 +10727,12 @@
               </a:defRPr>
             </a:pPr>
             <a:r>
+              <a:rPr/>
               <a:t>AIを「答え合わせ」に使うと、自分の仮説をAIに確認させるだけになる。</a:t>
             </a:r>
             <a:br/>
             <a:r>
+              <a:rPr/>
               <a:t>→ 医師のアンカリング + AIのアンカリング = バイアスの二重増幅</a:t>
             </a:r>
           </a:p>
@@ -10642,6 +10795,7 @@
               </a:defRPr>
             </a:pPr>
             <a:r>
+              <a:rPr/>
               <a:t>Slide 8: 「使いこなす力」— AIの3つの正しい使い方（19-22分）</a:t>
             </a:r>
           </a:p>
@@ -10678,6 +10832,7 @@
               </a:defRPr>
             </a:pPr>
             <a:r>
+              <a:rPr/>
               <a:t>「この症例で見落としている鑑別は？」と構造化を促す</a:t>
             </a:r>
           </a:p>
@@ -10715,6 +10870,7 @@
               <a:buChar char="●"/>
             </a:pPr>
             <a:r>
+              <a:rPr/>
               <a:t>バイアス対策: プレマチュアクロージャーの防止</a:t>
             </a:r>
           </a:p>
@@ -10751,6 +10907,7 @@
               </a:defRPr>
             </a:pPr>
             <a:r>
+              <a:rPr/>
               <a:t>「なぜその診断だと思いますか？他の可能性は？」と問いを立てる</a:t>
             </a:r>
           </a:p>
@@ -10788,6 +10945,7 @@
               <a:buChar char="●"/>
             </a:pPr>
             <a:r>
+              <a:rPr/>
               <a:t>バイアス対策: アンカリングの自覚を促す</a:t>
             </a:r>
           </a:p>
@@ -10824,6 +10982,7 @@
               </a:defRPr>
             </a:pPr>
             <a:r>
+              <a:rPr/>
               <a:t>「あなたの診断が間違っているとしたら、最も危険な見逃しは？」と反論する</a:t>
             </a:r>
           </a:p>
@@ -10861,6 +11020,7 @@
               <a:buChar char="●"/>
             </a:pPr>
             <a:r>
+              <a:rPr/>
               <a:t>バイアス対策: 利用可能性ヒューリスティクスの打破</a:t>
             </a:r>
           </a:p>
@@ -10905,7 +11065,9 @@
           <a:bodyPr rtlCol="0" anchor="ctr"/>
           <a:lstStyle/>
           <a:p>
-            <a:pPr algn="ctr"/>
+            <a:pPr algn="ctr">
+              <a:defRPr/>
+            </a:pPr>
           </a:p>
         </p:txBody>
       </p:sp>
@@ -10950,7 +11112,9 @@
           <a:bodyPr rtlCol="0" anchor="ctr"/>
           <a:lstStyle/>
           <a:p>
-            <a:pPr algn="ctr"/>
+            <a:pPr algn="ctr">
+              <a:defRPr/>
+            </a:pPr>
           </a:p>
         </p:txBody>
       </p:sp>
@@ -10985,10 +11149,12 @@
               </a:defRPr>
             </a:pPr>
             <a:r>
+              <a:rPr/>
               <a:t>キーインサイト: AIは「答えを出す道具」ではなく「問いを立てる鏡」として使うと効果的。</a:t>
             </a:r>
             <a:br/>
             <a:r>
+              <a:rPr/>
               <a:t>PNAS研究を踏まえると、AIに「判断」を委ねるのではなく「思考の拡張」に使うことが重要。</a:t>
             </a:r>
           </a:p>

--- a/output/education/2026-03-26_ai-medical-education-integrated/ai-medical-education-integrated_slides_residents.pptx
+++ b/output/education/2026-03-26_ai-medical-education-integrated/ai-medical-education-integrated_slides_residents.pptx
@@ -3136,6 +3136,7 @@
               </a:defRPr>
             </a:pPr>
             <a:r>
+              <a:rPr/>
               <a:t>AI時代の臨床推論</a:t>
             </a:r>
           </a:p>
@@ -3150,7 +3151,7 @@
         <p:spPr>
           <a:xfrm>
             <a:off x="457200" y="640080"/>
-            <a:ext cx="8229600" cy="548640"/>
+            <a:ext cx="8229600" cy="589279"/>
           </a:xfrm>
           <a:prstGeom prst="rect">
             <a:avLst/>
@@ -3172,6 +3173,7 @@
               </a:defRPr>
             </a:pPr>
             <a:r>
+              <a:rPr/>
               <a:t>使いこなす力と疑う力</a:t>
             </a:r>
           </a:p>
@@ -3216,7 +3218,9 @@
           <a:bodyPr rtlCol="0" anchor="ctr"/>
           <a:lstStyle/>
           <a:p>
-            <a:pPr algn="ctr"/>
+            <a:pPr algn="ctr">
+              <a:defRPr/>
+            </a:pPr>
           </a:p>
         </p:txBody>
       </p:sp>
@@ -3259,7 +3263,9 @@
           <a:bodyPr rtlCol="0" anchor="ctr"/>
           <a:lstStyle/>
           <a:p>
-            <a:pPr algn="ctr"/>
+            <a:pPr algn="ctr">
+              <a:defRPr/>
+            </a:pPr>
           </a:p>
         </p:txBody>
       </p:sp>
@@ -3294,6 +3300,7 @@
               </a:defRPr>
             </a:pPr>
             <a:r>
+              <a:rPr/>
               <a:t>80%超</a:t>
             </a:r>
           </a:p>
@@ -3308,7 +3315,7 @@
         <p:spPr>
           <a:xfrm>
             <a:off x="457200" y="2560320"/>
-            <a:ext cx="3840480" cy="274320"/>
+            <a:ext cx="3840480" cy="304799"/>
           </a:xfrm>
           <a:prstGeom prst="rect">
             <a:avLst/>
@@ -3330,6 +3337,7 @@
               </a:defRPr>
             </a:pPr>
             <a:r>
+              <a:rPr/>
               <a:t>の医師がAIを臨床活用</a:t>
             </a:r>
           </a:p>
@@ -3366,6 +3374,7 @@
               </a:defRPr>
             </a:pPr>
             <a:r>
+              <a:rPr/>
               <a:t>しかし…</a:t>
             </a:r>
           </a:p>
@@ -3410,7 +3419,9 @@
           <a:bodyPr rtlCol="0" anchor="ctr"/>
           <a:lstStyle/>
           <a:p>
-            <a:pPr algn="ctr"/>
+            <a:pPr algn="ctr">
+              <a:defRPr/>
+            </a:pPr>
           </a:p>
         </p:txBody>
       </p:sp>
@@ -3445,6 +3456,7 @@
               </a:defRPr>
             </a:pPr>
             <a:r>
+              <a:rPr/>
               <a:t>AI+医師 &lt; AI単独</a:t>
             </a:r>
           </a:p>
@@ -3459,7 +3471,7 @@
         <p:spPr>
           <a:xfrm>
             <a:off x="5029200" y="2560320"/>
-            <a:ext cx="3840480" cy="274320"/>
+            <a:ext cx="3840480" cy="304799"/>
           </a:xfrm>
           <a:prstGeom prst="rect">
             <a:avLst/>
@@ -3481,6 +3493,7 @@
               </a:defRPr>
             </a:pPr>
             <a:r>
+              <a:rPr/>
               <a:t>診断精度 76% vs 90%</a:t>
             </a:r>
           </a:p>
@@ -3525,7 +3538,9 @@
           <a:bodyPr rtlCol="0" anchor="ctr"/>
           <a:lstStyle/>
           <a:p>
-            <a:pPr algn="ctr"/>
+            <a:pPr algn="ctr">
+              <a:defRPr/>
+            </a:pPr>
           </a:p>
         </p:txBody>
       </p:sp>
@@ -3570,7 +3585,9 @@
           <a:bodyPr rtlCol="0" anchor="ctr"/>
           <a:lstStyle/>
           <a:p>
-            <a:pPr algn="ctr"/>
+            <a:pPr algn="ctr">
+              <a:defRPr/>
+            </a:pPr>
           </a:p>
         </p:txBody>
       </p:sp>
@@ -3605,10 +3622,12 @@
               </a:defRPr>
             </a:pPr>
             <a:r>
+              <a:rPr/>
               <a:t>AIは味方か、それとも新しい罠か？</a:t>
             </a:r>
             <a:br/>
             <a:r>
+              <a:rPr/>
               <a:t>— AMA調査 / IME 2026 / Frontiers in Digital Health 2025</a:t>
             </a:r>
           </a:p>
@@ -3671,6 +3690,7 @@
               </a:defRPr>
             </a:pPr>
             <a:r>
+              <a:rPr/>
               <a:t>持ち帰りのアクション</a:t>
             </a:r>
           </a:p>
@@ -3715,7 +3735,9 @@
           <a:bodyPr rtlCol="0" anchor="ctr"/>
           <a:lstStyle/>
           <a:p>
-            <a:pPr algn="ctr"/>
+            <a:pPr algn="ctr">
+              <a:defRPr/>
+            </a:pPr>
           </a:p>
         </p:txBody>
       </p:sp>
@@ -3758,7 +3780,9 @@
           <a:bodyPr rtlCol="0" anchor="ctr"/>
           <a:lstStyle/>
           <a:p>
-            <a:pPr algn="ctr"/>
+            <a:pPr algn="ctr">
+              <a:defRPr/>
+            </a:pPr>
           </a:p>
         </p:txBody>
       </p:sp>
@@ -3793,6 +3817,7 @@
               </a:defRPr>
             </a:pPr>
             <a:r>
+              <a:rPr/>
               <a:t>今日</a:t>
             </a:r>
           </a:p>
@@ -3829,6 +3854,7 @@
               </a:defRPr>
             </a:pPr>
             <a:r>
+              <a:rPr/>
               <a:t>次の症例で「まず自分で3つ鑑別」→ AIに聞く、を試す</a:t>
             </a:r>
           </a:p>
@@ -3873,7 +3899,9 @@
           <a:bodyPr rtlCol="0" anchor="ctr"/>
           <a:lstStyle/>
           <a:p>
-            <a:pPr algn="ctr"/>
+            <a:pPr algn="ctr">
+              <a:defRPr/>
+            </a:pPr>
           </a:p>
         </p:txBody>
       </p:sp>
@@ -3908,6 +3936,7 @@
               </a:defRPr>
             </a:pPr>
             <a:r>
+              <a:rPr/>
               <a:t>今週</a:t>
             </a:r>
           </a:p>
@@ -3944,6 +3973,7 @@
               </a:defRPr>
             </a:pPr>
             <a:r>
+              <a:rPr/>
               <a:t>AIの提案を1回は意識的に疑ってみる</a:t>
             </a:r>
           </a:p>
@@ -3988,7 +4018,9 @@
           <a:bodyPr rtlCol="0" anchor="ctr"/>
           <a:lstStyle/>
           <a:p>
-            <a:pPr algn="ctr"/>
+            <a:pPr algn="ctr">
+              <a:defRPr/>
+            </a:pPr>
           </a:p>
         </p:txBody>
       </p:sp>
@@ -4023,6 +4055,7 @@
               </a:defRPr>
             </a:pPr>
             <a:r>
+              <a:rPr/>
               <a:t>今月</a:t>
             </a:r>
           </a:p>
@@ -4059,6 +4092,7 @@
               </a:defRPr>
             </a:pPr>
             <a:r>
+              <a:rPr/>
               <a:t>AI活用の経験をポートフォリオに1つ書く</a:t>
             </a:r>
           </a:p>
@@ -4103,7 +4137,9 @@
           <a:bodyPr rtlCol="0" anchor="ctr"/>
           <a:lstStyle/>
           <a:p>
-            <a:pPr algn="ctr"/>
+            <a:pPr algn="ctr">
+              <a:defRPr/>
+            </a:pPr>
           </a:p>
         </p:txBody>
       </p:sp>
@@ -4148,7 +4184,9 @@
           <a:bodyPr rtlCol="0" anchor="ctr"/>
           <a:lstStyle/>
           <a:p>
-            <a:pPr algn="ctr"/>
+            <a:pPr algn="ctr">
+              <a:defRPr/>
+            </a:pPr>
           </a:p>
         </p:txBody>
       </p:sp>
@@ -4161,7 +4199,7 @@
         <p:spPr>
           <a:xfrm>
             <a:off x="1600200" y="4279392"/>
-            <a:ext cx="6035040" cy="310896"/>
+            <a:ext cx="6035040" cy="340360"/>
           </a:xfrm>
           <a:prstGeom prst="rect">
             <a:avLst/>
@@ -4183,6 +4221,7 @@
               </a:defRPr>
             </a:pPr>
             <a:r>
+              <a:rPr/>
               <a:t>AIは最強の相棒になれる。でも、主治医はあなたです。</a:t>
             </a:r>
           </a:p>
@@ -4223,7 +4262,7 @@
         <p:spPr>
           <a:xfrm>
             <a:off x="457200" y="274320"/>
-            <a:ext cx="8229600" cy="457200"/>
+            <a:ext cx="8229600" cy="484632"/>
           </a:xfrm>
           <a:prstGeom prst="rect">
             <a:avLst/>
@@ -4245,6 +4284,7 @@
               </a:defRPr>
             </a:pPr>
             <a:r>
+              <a:rPr/>
               <a:t>今日の学習目標（45分）</a:t>
             </a:r>
           </a:p>
@@ -4289,7 +4329,9 @@
           <a:bodyPr rtlCol="0" anchor="ctr"/>
           <a:lstStyle/>
           <a:p>
-            <a:pPr algn="ctr"/>
+            <a:pPr algn="ctr">
+              <a:defRPr/>
+            </a:pPr>
           </a:p>
         </p:txBody>
       </p:sp>
@@ -4334,7 +4376,9 @@
           <a:bodyPr rtlCol="0" anchor="ctr"/>
           <a:lstStyle/>
           <a:p>
-            <a:pPr algn="ctr"/>
+            <a:pPr algn="ctr">
+              <a:defRPr/>
+            </a:pPr>
           </a:p>
         </p:txBody>
       </p:sp>
@@ -4369,6 +4413,7 @@
               </a:defRPr>
             </a:pPr>
             <a:r>
+              <a:rPr/>
               <a:t>説明できる</a:t>
             </a:r>
           </a:p>
@@ -4405,6 +4450,7 @@
               </a:defRPr>
             </a:pPr>
             <a:r>
+              <a:rPr/>
               <a:t>AIの3世代とマルチエージェントの概念</a:t>
             </a:r>
           </a:p>
@@ -4451,7 +4497,9 @@
           <a:bodyPr rtlCol="0" anchor="ctr"/>
           <a:lstStyle/>
           <a:p>
-            <a:pPr algn="ctr"/>
+            <a:pPr algn="ctr">
+              <a:defRPr/>
+            </a:pPr>
           </a:p>
         </p:txBody>
       </p:sp>
@@ -4486,6 +4534,7 @@
               </a:defRPr>
             </a:pPr>
             <a:r>
+              <a:rPr/>
               <a:t>分析できる</a:t>
             </a:r>
           </a:p>
@@ -4522,6 +4571,7 @@
               </a:defRPr>
             </a:pPr>
             <a:r>
+              <a:rPr/>
               <a:t>AIが持つ認知バイアスの種類</a:t>
             </a:r>
           </a:p>
@@ -4568,7 +4618,9 @@
           <a:bodyPr rtlCol="0" anchor="ctr"/>
           <a:lstStyle/>
           <a:p>
-            <a:pPr algn="ctr"/>
+            <a:pPr algn="ctr">
+              <a:defRPr/>
+            </a:pPr>
           </a:p>
         </p:txBody>
       </p:sp>
@@ -4603,6 +4655,7 @@
               </a:defRPr>
             </a:pPr>
             <a:r>
+              <a:rPr/>
               <a:t>判断できる</a:t>
             </a:r>
           </a:p>
@@ -4639,6 +4692,7 @@
               </a:defRPr>
             </a:pPr>
             <a:r>
+              <a:rPr/>
               <a:t>AIを使うべき場面と逆効果な場面</a:t>
             </a:r>
           </a:p>
@@ -4685,7 +4739,9 @@
           <a:bodyPr rtlCol="0" anchor="ctr"/>
           <a:lstStyle/>
           <a:p>
-            <a:pPr algn="ctr"/>
+            <a:pPr algn="ctr">
+              <a:defRPr/>
+            </a:pPr>
           </a:p>
         </p:txBody>
       </p:sp>
@@ -4720,6 +4776,7 @@
               </a:defRPr>
             </a:pPr>
             <a:r>
+              <a:rPr/>
               <a:t>提案できる</a:t>
             </a:r>
           </a:p>
@@ -4756,6 +4813,7 @@
               </a:defRPr>
             </a:pPr>
             <a:r>
+              <a:rPr/>
               <a:t>自分の研修にAIをどう組み込むか</a:t>
             </a:r>
           </a:p>
@@ -4796,7 +4854,7 @@
         <p:spPr>
           <a:xfrm>
             <a:off x="457200" y="274320"/>
-            <a:ext cx="8229600" cy="457200"/>
+            <a:ext cx="8229600" cy="482600"/>
           </a:xfrm>
           <a:prstGeom prst="rect">
             <a:avLst/>
@@ -4818,6 +4876,7 @@
               </a:defRPr>
             </a:pPr>
             <a:r>
+              <a:rPr/>
               <a:t>AIの進化 — 3世代</a:t>
             </a:r>
           </a:p>
@@ -4862,7 +4921,9 @@
           <a:bodyPr rtlCol="0" anchor="ctr"/>
           <a:lstStyle/>
           <a:p>
-            <a:pPr algn="ctr"/>
+            <a:pPr algn="ctr">
+              <a:defRPr/>
+            </a:pPr>
           </a:p>
         </p:txBody>
       </p:sp>
@@ -4907,7 +4968,9 @@
           <a:bodyPr rtlCol="0" anchor="ctr"/>
           <a:lstStyle/>
           <a:p>
-            <a:pPr algn="ctr"/>
+            <a:pPr algn="ctr">
+              <a:defRPr/>
+            </a:pPr>
           </a:p>
         </p:txBody>
       </p:sp>
@@ -4942,6 +5005,7 @@
               </a:defRPr>
             </a:pPr>
             <a:r>
+              <a:rPr/>
               <a:t>第1世代</a:t>
             </a:r>
           </a:p>
@@ -4956,7 +5020,7 @@
         <p:spPr>
           <a:xfrm>
             <a:off x="2011680" y="1143000"/>
-            <a:ext cx="2286000" cy="365760"/>
+            <a:ext cx="2286000" cy="375920"/>
           </a:xfrm>
           <a:prstGeom prst="rect">
             <a:avLst/>
@@ -4978,6 +5042,7 @@
               </a:defRPr>
             </a:pPr>
             <a:r>
+              <a:rPr/>
               <a:t>ルールベース</a:t>
             </a:r>
           </a:p>
@@ -5014,6 +5079,7 @@
               </a:defRPr>
             </a:pPr>
             <a:r>
+              <a:rPr/>
               <a:t>人間がルールを書く</a:t>
             </a:r>
           </a:p>
@@ -5050,6 +5116,7 @@
               </a:defRPr>
             </a:pPr>
             <a:r>
+              <a:rPr/>
               <a:t>例: 処方チェックシステム</a:t>
             </a:r>
           </a:p>
@@ -5096,7 +5163,9 @@
           <a:bodyPr rtlCol="0" anchor="ctr"/>
           <a:lstStyle/>
           <a:p>
-            <a:pPr algn="ctr"/>
+            <a:pPr algn="ctr">
+              <a:defRPr/>
+            </a:pPr>
           </a:p>
         </p:txBody>
       </p:sp>
@@ -5131,6 +5200,7 @@
               </a:defRPr>
             </a:pPr>
             <a:r>
+              <a:rPr/>
               <a:t>第2世代</a:t>
             </a:r>
           </a:p>
@@ -5145,7 +5215,7 @@
         <p:spPr>
           <a:xfrm>
             <a:off x="2011680" y="2331720"/>
-            <a:ext cx="2286000" cy="365760"/>
+            <a:ext cx="2286000" cy="375920"/>
           </a:xfrm>
           <a:prstGeom prst="rect">
             <a:avLst/>
@@ -5167,6 +5237,7 @@
               </a:defRPr>
             </a:pPr>
             <a:r>
+              <a:rPr/>
               <a:t>生成AI</a:t>
             </a:r>
           </a:p>
@@ -5203,6 +5274,7 @@
               </a:defRPr>
             </a:pPr>
             <a:r>
+              <a:rPr/>
               <a:t>1つのAIが何でもやる</a:t>
             </a:r>
           </a:p>
@@ -5239,6 +5311,7 @@
               </a:defRPr>
             </a:pPr>
             <a:r>
+              <a:rPr/>
               <a:t>例: ChatGPTに症例を聞く</a:t>
             </a:r>
           </a:p>
@@ -5285,7 +5358,9 @@
           <a:bodyPr rtlCol="0" anchor="ctr"/>
           <a:lstStyle/>
           <a:p>
-            <a:pPr algn="ctr"/>
+            <a:pPr algn="ctr">
+              <a:defRPr/>
+            </a:pPr>
           </a:p>
         </p:txBody>
       </p:sp>
@@ -5320,6 +5395,7 @@
               </a:defRPr>
             </a:pPr>
             <a:r>
+              <a:rPr/>
               <a:t>第3世代</a:t>
             </a:r>
           </a:p>
@@ -5334,7 +5410,7 @@
         <p:spPr>
           <a:xfrm>
             <a:off x="2011680" y="3520439"/>
-            <a:ext cx="2286000" cy="365760"/>
+            <a:ext cx="2286000" cy="375920"/>
           </a:xfrm>
           <a:prstGeom prst="rect">
             <a:avLst/>
@@ -5356,6 +5432,7 @@
               </a:defRPr>
             </a:pPr>
             <a:r>
+              <a:rPr/>
               <a:t>エージェントAI</a:t>
             </a:r>
           </a:p>
@@ -5392,6 +5469,7 @@
               </a:defRPr>
             </a:pPr>
             <a:r>
+              <a:rPr/>
               <a:t>専門AIチームが協力</a:t>
             </a:r>
           </a:p>
@@ -5428,6 +5506,7 @@
               </a:defRPr>
             </a:pPr>
             <a:r>
+              <a:rPr/>
               <a:t>例: 複数AIが分担して診断支援</a:t>
             </a:r>
           </a:p>
@@ -5490,6 +5569,7 @@
               </a:defRPr>
             </a:pPr>
             <a:r>
+              <a:rPr/>
               <a:t>マルチエージェント = チーム医療のAI版</a:t>
             </a:r>
           </a:p>
@@ -5534,7 +5614,9 @@
           <a:bodyPr rtlCol="0" anchor="ctr"/>
           <a:lstStyle/>
           <a:p>
-            <a:pPr algn="ctr"/>
+            <a:pPr algn="ctr">
+              <a:defRPr/>
+            </a:pPr>
           </a:p>
         </p:txBody>
       </p:sp>
@@ -5577,7 +5659,9 @@
           <a:bodyPr rtlCol="0" anchor="ctr"/>
           <a:lstStyle/>
           <a:p>
-            <a:pPr algn="ctr"/>
+            <a:pPr algn="ctr">
+              <a:defRPr/>
+            </a:pPr>
           </a:p>
         </p:txBody>
       </p:sp>
@@ -5612,6 +5696,7 @@
               </a:defRPr>
             </a:pPr>
             <a:r>
+              <a:rPr/>
               <a:t>Supervisor Agent（総合医）</a:t>
             </a:r>
           </a:p>
@@ -5658,7 +5743,9 @@
           <a:bodyPr rtlCol="0" anchor="ctr"/>
           <a:lstStyle/>
           <a:p>
-            <a:pPr algn="ctr"/>
+            <a:pPr algn="ctr">
+              <a:defRPr/>
+            </a:pPr>
           </a:p>
         </p:txBody>
       </p:sp>
@@ -5693,6 +5780,7 @@
               </a:defRPr>
             </a:pPr>
             <a:r>
+              <a:rPr/>
               <a:t>検査データ専門</a:t>
             </a:r>
           </a:p>
@@ -5739,7 +5827,9 @@
           <a:bodyPr rtlCol="0" anchor="ctr"/>
           <a:lstStyle/>
           <a:p>
-            <a:pPr algn="ctr"/>
+            <a:pPr algn="ctr">
+              <a:defRPr/>
+            </a:pPr>
           </a:p>
         </p:txBody>
       </p:sp>
@@ -5774,6 +5864,7 @@
               </a:defRPr>
             </a:pPr>
             <a:r>
+              <a:rPr/>
               <a:t>画像診断専門</a:t>
             </a:r>
           </a:p>
@@ -5820,7 +5911,9 @@
           <a:bodyPr rtlCol="0" anchor="ctr"/>
           <a:lstStyle/>
           <a:p>
-            <a:pPr algn="ctr"/>
+            <a:pPr algn="ctr">
+              <a:defRPr/>
+            </a:pPr>
           </a:p>
         </p:txBody>
       </p:sp>
@@ -5855,6 +5948,7 @@
               </a:defRPr>
             </a:pPr>
             <a:r>
+              <a:rPr/>
               <a:t>薬剤相互作用</a:t>
             </a:r>
           </a:p>
@@ -5901,7 +5995,9 @@
           <a:bodyPr rtlCol="0" anchor="ctr"/>
           <a:lstStyle/>
           <a:p>
-            <a:pPr algn="ctr"/>
+            <a:pPr algn="ctr">
+              <a:defRPr/>
+            </a:pPr>
           </a:p>
         </p:txBody>
       </p:sp>
@@ -5936,6 +6032,7 @@
               </a:defRPr>
             </a:pPr>
             <a:r>
+              <a:rPr/>
               <a:t>ガイドライン照合</a:t>
             </a:r>
           </a:p>
@@ -5950,7 +6047,7 @@
         <p:spPr>
           <a:xfrm>
             <a:off x="457200" y="3017520"/>
-            <a:ext cx="8229600" cy="274320"/>
+            <a:ext cx="8229600" cy="340360"/>
           </a:xfrm>
           <a:prstGeom prst="rect">
             <a:avLst/>
@@ -5972,6 +6069,7 @@
               </a:defRPr>
             </a:pPr>
             <a:r>
+              <a:rPr/>
               <a:t>Mount Sinai研究の3つの発見</a:t>
             </a:r>
           </a:p>
@@ -6008,6 +6106,7 @@
               </a:defRPr>
             </a:pPr>
             <a:r>
+              <a:rPr/>
               <a:t>  精度向上:</a:t>
             </a:r>
           </a:p>
@@ -6044,6 +6143,7 @@
               </a:defRPr>
             </a:pPr>
             <a:r>
+              <a:rPr/>
               <a:t>マルチエージェントが単一AIを統計的に有意に上回る</a:t>
             </a:r>
           </a:p>
@@ -6080,6 +6180,7 @@
               </a:defRPr>
             </a:pPr>
             <a:r>
+              <a:rPr/>
               <a:t>  コスト削減:</a:t>
             </a:r>
           </a:p>
@@ -6116,6 +6217,7 @@
               </a:defRPr>
             </a:pPr>
             <a:r>
+              <a:rPr/>
               <a:t>計算コストを最大65分の1に</a:t>
             </a:r>
           </a:p>
@@ -6152,6 +6254,7 @@
               </a:defRPr>
             </a:pPr>
             <a:r>
+              <a:rPr/>
               <a:t>  スケーラビリティ:</a:t>
             </a:r>
           </a:p>
@@ -6188,6 +6291,7 @@
               </a:defRPr>
             </a:pPr>
             <a:r>
+              <a:rPr/>
               <a:t>タスク増加でも性能維持（単一AIは低下）</a:t>
             </a:r>
           </a:p>
@@ -6228,7 +6332,7 @@
         <p:spPr>
           <a:xfrm>
             <a:off x="457200" y="274320"/>
-            <a:ext cx="8229600" cy="457200"/>
+            <a:ext cx="8229600" cy="482600"/>
           </a:xfrm>
           <a:prstGeom prst="rect">
             <a:avLst/>
@@ -6250,6 +6354,7 @@
               </a:defRPr>
             </a:pPr>
             <a:r>
+              <a:rPr/>
               <a:t>AIが引き起こす認知バイアス</a:t>
             </a:r>
           </a:p>
@@ -6294,7 +6399,9 @@
           <a:bodyPr rtlCol="0" anchor="ctr"/>
           <a:lstStyle/>
           <a:p>
-            <a:pPr algn="ctr"/>
+            <a:pPr algn="ctr">
+              <a:defRPr/>
+            </a:pPr>
           </a:p>
         </p:txBody>
       </p:sp>
@@ -6337,7 +6444,9 @@
           <a:bodyPr rtlCol="0" anchor="ctr"/>
           <a:lstStyle/>
           <a:p>
-            <a:pPr algn="ctr"/>
+            <a:pPr algn="ctr">
+              <a:defRPr/>
+            </a:pPr>
           </a:p>
         </p:txBody>
       </p:sp>
@@ -6350,7 +6459,7 @@
         <p:spPr>
           <a:xfrm>
             <a:off x="640080" y="1143000"/>
-            <a:ext cx="3657600" cy="365760"/>
+            <a:ext cx="3657600" cy="375920"/>
           </a:xfrm>
           <a:prstGeom prst="rect">
             <a:avLst/>
@@ -6372,6 +6481,7 @@
               </a:defRPr>
             </a:pPr>
             <a:r>
+              <a:rPr/>
               <a:t>アンカリング</a:t>
             </a:r>
           </a:p>
@@ -6408,6 +6518,7 @@
               </a:defRPr>
             </a:pPr>
             <a:r>
+              <a:rPr/>
               <a:t>AIの最初の提案に引きずられる</a:t>
             </a:r>
           </a:p>
@@ -6452,7 +6563,9 @@
           <a:bodyPr rtlCol="0" anchor="ctr"/>
           <a:lstStyle/>
           <a:p>
-            <a:pPr algn="ctr"/>
+            <a:pPr algn="ctr">
+              <a:defRPr/>
+            </a:pPr>
           </a:p>
         </p:txBody>
       </p:sp>
@@ -6487,6 +6600,7 @@
               </a:defRPr>
             </a:pPr>
             <a:r>
+              <a:rPr/>
               <a:t>対策</a:t>
             </a:r>
           </a:p>
@@ -6523,6 +6637,7 @@
               </a:defRPr>
             </a:pPr>
             <a:r>
+              <a:rPr/>
               <a:t>鑑別を自分で考えてからAIに聞く</a:t>
             </a:r>
           </a:p>
@@ -6567,7 +6682,9 @@
           <a:bodyPr rtlCol="0" anchor="ctr"/>
           <a:lstStyle/>
           <a:p>
-            <a:pPr algn="ctr"/>
+            <a:pPr algn="ctr">
+              <a:defRPr/>
+            </a:pPr>
           </a:p>
         </p:txBody>
       </p:sp>
@@ -6580,7 +6697,7 @@
         <p:spPr>
           <a:xfrm>
             <a:off x="640080" y="2423159"/>
-            <a:ext cx="3657600" cy="365760"/>
+            <a:ext cx="3657600" cy="375920"/>
           </a:xfrm>
           <a:prstGeom prst="rect">
             <a:avLst/>
@@ -6602,6 +6719,7 @@
               </a:defRPr>
             </a:pPr>
             <a:r>
+              <a:rPr/>
               <a:t>自動化バイアス</a:t>
             </a:r>
           </a:p>
@@ -6638,6 +6756,7 @@
               </a:defRPr>
             </a:pPr>
             <a:r>
+              <a:rPr/>
               <a:t>AIが正しいと無条件に信じる</a:t>
             </a:r>
           </a:p>
@@ -6682,7 +6801,9 @@
           <a:bodyPr rtlCol="0" anchor="ctr"/>
           <a:lstStyle/>
           <a:p>
-            <a:pPr algn="ctr"/>
+            <a:pPr algn="ctr">
+              <a:defRPr/>
+            </a:pPr>
           </a:p>
         </p:txBody>
       </p:sp>
@@ -6717,6 +6838,7 @@
               </a:defRPr>
             </a:pPr>
             <a:r>
+              <a:rPr/>
               <a:t>対策</a:t>
             </a:r>
           </a:p>
@@ -6753,6 +6875,7 @@
               </a:defRPr>
             </a:pPr>
             <a:r>
+              <a:rPr/>
               <a:t>「AIが言ったから」を理由にしない</a:t>
             </a:r>
           </a:p>
@@ -6797,7 +6920,9 @@
           <a:bodyPr rtlCol="0" anchor="ctr"/>
           <a:lstStyle/>
           <a:p>
-            <a:pPr algn="ctr"/>
+            <a:pPr algn="ctr">
+              <a:defRPr/>
+            </a:pPr>
           </a:p>
         </p:txBody>
       </p:sp>
@@ -6810,7 +6935,7 @@
         <p:spPr>
           <a:xfrm>
             <a:off x="640080" y="3703320"/>
-            <a:ext cx="3657600" cy="365760"/>
+            <a:ext cx="3657600" cy="375920"/>
           </a:xfrm>
           <a:prstGeom prst="rect">
             <a:avLst/>
@@ -6832,6 +6957,7 @@
               </a:defRPr>
             </a:pPr>
             <a:r>
+              <a:rPr/>
               <a:t>確証バイアス</a:t>
             </a:r>
           </a:p>
@@ -6868,6 +6994,7 @@
               </a:defRPr>
             </a:pPr>
             <a:r>
+              <a:rPr/>
               <a:t>AIの答えを支持する情報だけ探す</a:t>
             </a:r>
           </a:p>
@@ -6912,7 +7039,9 @@
           <a:bodyPr rtlCol="0" anchor="ctr"/>
           <a:lstStyle/>
           <a:p>
-            <a:pPr algn="ctr"/>
+            <a:pPr algn="ctr">
+              <a:defRPr/>
+            </a:pPr>
           </a:p>
         </p:txBody>
       </p:sp>
@@ -6947,6 +7076,7 @@
               </a:defRPr>
             </a:pPr>
             <a:r>
+              <a:rPr/>
               <a:t>対策</a:t>
             </a:r>
           </a:p>
@@ -6983,6 +7113,7 @@
               </a:defRPr>
             </a:pPr>
             <a:r>
+              <a:rPr/>
               <a:t>反証を意識的に探すルーチン</a:t>
             </a:r>
           </a:p>
@@ -7045,6 +7176,7 @@
               </a:defRPr>
             </a:pPr>
             <a:r>
+              <a:rPr/>
               <a:t>AIを使うべき場面 vs 使うと危ない場面</a:t>
             </a:r>
           </a:p>
@@ -7089,7 +7221,9 @@
           <a:bodyPr rtlCol="0" anchor="ctr"/>
           <a:lstStyle/>
           <a:p>
-            <a:pPr algn="ctr"/>
+            <a:pPr algn="ctr">
+              <a:defRPr/>
+            </a:pPr>
           </a:p>
         </p:txBody>
       </p:sp>
@@ -7132,7 +7266,9 @@
           <a:bodyPr rtlCol="0" anchor="ctr"/>
           <a:lstStyle/>
           <a:p>
-            <a:pPr algn="ctr"/>
+            <a:pPr algn="ctr">
+              <a:defRPr/>
+            </a:pPr>
           </a:p>
         </p:txBody>
       </p:sp>
@@ -7145,7 +7281,7 @@
         <p:spPr>
           <a:xfrm>
             <a:off x="457200" y="1143000"/>
-            <a:ext cx="3931920" cy="365760"/>
+            <a:ext cx="3931920" cy="375920"/>
           </a:xfrm>
           <a:prstGeom prst="rect">
             <a:avLst/>
@@ -7167,6 +7303,7 @@
               </a:defRPr>
             </a:pPr>
             <a:r>
+              <a:rPr/>
               <a:t>AIが得意</a:t>
             </a:r>
           </a:p>
@@ -7204,6 +7341,7 @@
               <a:buChar char="●"/>
             </a:pPr>
             <a:r>
+              <a:rPr/>
               <a:t>網羅的な鑑別診断リスト</a:t>
             </a:r>
           </a:p>
@@ -7218,6 +7356,7 @@
               <a:buChar char="●"/>
             </a:pPr>
             <a:r>
+              <a:rPr/>
               <a:t>ガイドラインの確認</a:t>
             </a:r>
           </a:p>
@@ -7232,6 +7371,7 @@
               <a:buChar char="●"/>
             </a:pPr>
             <a:r>
+              <a:rPr/>
               <a:t>薬剤相互作用チェック</a:t>
             </a:r>
           </a:p>
@@ -7246,6 +7386,7 @@
               <a:buChar char="●"/>
             </a:pPr>
             <a:r>
+              <a:rPr/>
               <a:t>文献検索・要約</a:t>
             </a:r>
           </a:p>
@@ -7260,6 +7401,7 @@
               <a:buChar char="●"/>
             </a:pPr>
             <a:r>
+              <a:rPr/>
               <a:t>教育シナリオの生成</a:t>
             </a:r>
           </a:p>
@@ -7304,7 +7446,9 @@
           <a:bodyPr rtlCol="0" anchor="ctr"/>
           <a:lstStyle/>
           <a:p>
-            <a:pPr algn="ctr"/>
+            <a:pPr algn="ctr">
+              <a:defRPr/>
+            </a:pPr>
           </a:p>
         </p:txBody>
       </p:sp>
@@ -7317,7 +7461,7 @@
         <p:spPr>
           <a:xfrm>
             <a:off x="4754880" y="1143000"/>
-            <a:ext cx="4114800" cy="365760"/>
+            <a:ext cx="4114800" cy="375920"/>
           </a:xfrm>
           <a:prstGeom prst="rect">
             <a:avLst/>
@@ -7339,6 +7483,7 @@
               </a:defRPr>
             </a:pPr>
             <a:r>
+              <a:rPr/>
               <a:t>AIが危ない</a:t>
             </a:r>
           </a:p>
@@ -7376,6 +7521,7 @@
               <a:buChar char="●"/>
             </a:pPr>
             <a:r>
+              <a:rPr/>
               <a:t>未経験の症候の最終診断</a:t>
             </a:r>
           </a:p>
@@ -7390,6 +7536,7 @@
               <a:buChar char="●"/>
             </a:pPr>
             <a:r>
+              <a:rPr/>
               <a:t>患者の価値観を踏まえた意思決定</a:t>
             </a:r>
           </a:p>
@@ -7404,6 +7551,7 @@
               <a:buChar char="●"/>
             </a:pPr>
             <a:r>
+              <a:rPr/>
               <a:t>文脈依存の臨床判断</a:t>
             </a:r>
           </a:p>
@@ -7418,6 +7566,7 @@
               <a:buChar char="●"/>
             </a:pPr>
             <a:r>
+              <a:rPr/>
               <a:t>ハルシネーション（もっともらしい嘘）</a:t>
             </a:r>
           </a:p>
@@ -7432,6 +7581,7 @@
               <a:buChar char="●"/>
             </a:pPr>
             <a:r>
+              <a:rPr/>
               <a:t>感情的サポートが必要な場面</a:t>
             </a:r>
           </a:p>
@@ -7476,7 +7626,9 @@
           <a:bodyPr rtlCol="0" anchor="ctr"/>
           <a:lstStyle/>
           <a:p>
-            <a:pPr algn="ctr"/>
+            <a:pPr algn="ctr">
+              <a:defRPr/>
+            </a:pPr>
           </a:p>
         </p:txBody>
       </p:sp>
@@ -7521,7 +7673,9 @@
           <a:bodyPr rtlCol="0" anchor="ctr"/>
           <a:lstStyle/>
           <a:p>
-            <a:pPr algn="ctr"/>
+            <a:pPr algn="ctr">
+              <a:defRPr/>
+            </a:pPr>
           </a:p>
         </p:txBody>
       </p:sp>
@@ -7534,7 +7688,7 @@
         <p:spPr>
           <a:xfrm>
             <a:off x="685800" y="3913632"/>
-            <a:ext cx="7863840" cy="310896"/>
+            <a:ext cx="7863840" cy="322579"/>
           </a:xfrm>
           <a:prstGeom prst="rect">
             <a:avLst/>
@@ -7556,6 +7710,7 @@
               </a:defRPr>
             </a:pPr>
             <a:r>
+              <a:rPr/>
               <a:t>AIは「考える相棒」であって「判断する主治医」ではない</a:t>
             </a:r>
           </a:p>
@@ -7596,7 +7751,7 @@
         <p:spPr>
           <a:xfrm>
             <a:off x="457200" y="274320"/>
-            <a:ext cx="8229600" cy="457200"/>
+            <a:ext cx="8229600" cy="484632"/>
           </a:xfrm>
           <a:prstGeom prst="rect">
             <a:avLst/>
@@ -7618,6 +7773,7 @@
               </a:defRPr>
             </a:pPr>
             <a:r>
+              <a:rPr/>
               <a:t>AIロールプレイ（15分）</a:t>
             </a:r>
           </a:p>
@@ -7662,7 +7818,9 @@
           <a:bodyPr rtlCol="0" anchor="ctr"/>
           <a:lstStyle/>
           <a:p>
-            <a:pPr algn="ctr"/>
+            <a:pPr algn="ctr">
+              <a:defRPr/>
+            </a:pPr>
           </a:p>
         </p:txBody>
       </p:sp>
@@ -7675,7 +7833,7 @@
         <p:spPr>
           <a:xfrm>
             <a:off x="457200" y="1097280"/>
-            <a:ext cx="8229600" cy="274320"/>
+            <a:ext cx="8229600" cy="340360"/>
           </a:xfrm>
           <a:prstGeom prst="rect">
             <a:avLst/>
@@ -7697,6 +7855,7 @@
               </a:defRPr>
             </a:pPr>
             <a:r>
+              <a:rPr/>
               <a:t>3つの役割を体験してみましょう</a:t>
             </a:r>
           </a:p>
@@ -7743,7 +7902,9 @@
           <a:bodyPr rtlCol="0" anchor="ctr"/>
           <a:lstStyle/>
           <a:p>
-            <a:pPr algn="ctr"/>
+            <a:pPr algn="ctr">
+              <a:defRPr/>
+            </a:pPr>
           </a:p>
         </p:txBody>
       </p:sp>
@@ -7756,7 +7917,7 @@
         <p:spPr>
           <a:xfrm>
             <a:off x="914400" y="1600200"/>
-            <a:ext cx="2286000" cy="365760"/>
+            <a:ext cx="2286000" cy="411479"/>
           </a:xfrm>
           <a:prstGeom prst="rect">
             <a:avLst/>
@@ -7778,6 +7939,7 @@
               </a:defRPr>
             </a:pPr>
             <a:r>
+              <a:rPr/>
               <a:t>Patient AI</a:t>
             </a:r>
           </a:p>
@@ -7814,10 +7976,12 @@
               </a:defRPr>
             </a:pPr>
             <a:r>
+              <a:rPr/>
               <a:t>症例を提示する</a:t>
             </a:r>
             <a:br/>
             <a:r>
+              <a:rPr/>
               <a:t>（症状・検査結果を段階的に開示）</a:t>
             </a:r>
           </a:p>
@@ -7864,7 +8028,9 @@
           <a:bodyPr rtlCol="0" anchor="ctr"/>
           <a:lstStyle/>
           <a:p>
-            <a:pPr algn="ctr"/>
+            <a:pPr algn="ctr">
+              <a:defRPr/>
+            </a:pPr>
           </a:p>
         </p:txBody>
       </p:sp>
@@ -7877,7 +8043,7 @@
         <p:spPr>
           <a:xfrm>
             <a:off x="914400" y="2697479"/>
-            <a:ext cx="2286000" cy="365760"/>
+            <a:ext cx="2286000" cy="411479"/>
           </a:xfrm>
           <a:prstGeom prst="rect">
             <a:avLst/>
@@ -7899,6 +8065,7 @@
               </a:defRPr>
             </a:pPr>
             <a:r>
+              <a:rPr/>
               <a:t>Socratic AI</a:t>
             </a:r>
           </a:p>
@@ -7935,10 +8102,12 @@
               </a:defRPr>
             </a:pPr>
             <a:r>
+              <a:rPr/>
               <a:t>考えを深める質問をする</a:t>
             </a:r>
             <a:br/>
             <a:r>
+              <a:rPr/>
               <a:t>（「なぜそう考えた？」「他には？」）</a:t>
             </a:r>
           </a:p>
@@ -7985,7 +8154,9 @@
           <a:bodyPr rtlCol="0" anchor="ctr"/>
           <a:lstStyle/>
           <a:p>
-            <a:pPr algn="ctr"/>
+            <a:pPr algn="ctr">
+              <a:defRPr/>
+            </a:pPr>
           </a:p>
         </p:txBody>
       </p:sp>
@@ -7998,7 +8169,7 @@
         <p:spPr>
           <a:xfrm>
             <a:off x="914400" y="3794759"/>
-            <a:ext cx="2286000" cy="365760"/>
+            <a:ext cx="2286000" cy="411479"/>
           </a:xfrm>
           <a:prstGeom prst="rect">
             <a:avLst/>
@@ -8020,6 +8191,7 @@
               </a:defRPr>
             </a:pPr>
             <a:r>
+              <a:rPr/>
               <a:t>Red Team AI</a:t>
             </a:r>
           </a:p>
@@ -8056,10 +8228,12 @@
               </a:defRPr>
             </a:pPr>
             <a:r>
+              <a:rPr/>
               <a:t>意図的に反論する</a:t>
             </a:r>
             <a:br/>
             <a:r>
+              <a:rPr/>
               <a:t>（「この診断を否定するエビデンスは？」）</a:t>
             </a:r>
           </a:p>
@@ -8074,7 +8248,7 @@
         <p:spPr>
           <a:xfrm>
             <a:off x="457200" y="4572000"/>
-            <a:ext cx="8229600" cy="274320"/>
+            <a:ext cx="8229600" cy="304799"/>
           </a:xfrm>
           <a:prstGeom prst="rect">
             <a:avLst/>
@@ -8096,6 +8270,7 @@
               </a:defRPr>
             </a:pPr>
             <a:r>
+              <a:rPr/>
               <a:t>3人1組 | 各役割5分ずつ | 症例は配布シート参照</a:t>
             </a:r>
           </a:p>
@@ -8136,7 +8311,7 @@
         <p:spPr>
           <a:xfrm>
             <a:off x="457200" y="274320"/>
-            <a:ext cx="8229600" cy="457200"/>
+            <a:ext cx="8229600" cy="482600"/>
           </a:xfrm>
           <a:prstGeom prst="rect">
             <a:avLst/>
@@ -8158,6 +8333,7 @@
               </a:defRPr>
             </a:pPr>
             <a:r>
+              <a:rPr/>
               <a:t>ロールプレイの振り返り</a:t>
             </a:r>
           </a:p>
@@ -8202,7 +8378,9 @@
           <a:bodyPr rtlCol="0" anchor="ctr"/>
           <a:lstStyle/>
           <a:p>
-            <a:pPr algn="ctr"/>
+            <a:pPr algn="ctr">
+              <a:defRPr/>
+            </a:pPr>
           </a:p>
         </p:txBody>
       </p:sp>
@@ -8247,7 +8425,9 @@
           <a:bodyPr rtlCol="0" anchor="ctr"/>
           <a:lstStyle/>
           <a:p>
-            <a:pPr algn="ctr"/>
+            <a:pPr algn="ctr">
+              <a:defRPr/>
+            </a:pPr>
           </a:p>
         </p:txBody>
       </p:sp>
@@ -8282,6 +8462,7 @@
               </a:defRPr>
             </a:pPr>
             <a:r>
+              <a:rPr/>
               <a:t>AIに引きずられた瞬間はあったか？</a:t>
             </a:r>
           </a:p>
@@ -8328,7 +8509,9 @@
           <a:bodyPr rtlCol="0" anchor="ctr"/>
           <a:lstStyle/>
           <a:p>
-            <a:pPr algn="ctr"/>
+            <a:pPr algn="ctr">
+              <a:defRPr/>
+            </a:pPr>
           </a:p>
         </p:txBody>
       </p:sp>
@@ -8363,6 +8546,7 @@
               </a:defRPr>
             </a:pPr>
             <a:r>
+              <a:rPr/>
               <a:t>「自分で考える」と「AIに聞く」のバランスは？</a:t>
             </a:r>
           </a:p>
@@ -8409,7 +8593,9 @@
           <a:bodyPr rtlCol="0" anchor="ctr"/>
           <a:lstStyle/>
           <a:p>
-            <a:pPr algn="ctr"/>
+            <a:pPr algn="ctr">
+              <a:defRPr/>
+            </a:pPr>
           </a:p>
         </p:txBody>
       </p:sp>
@@ -8444,6 +8630,7 @@
               </a:defRPr>
             </a:pPr>
             <a:r>
+              <a:rPr/>
               <a:t>Red Teamの反論で気づきはあったか？</a:t>
             </a:r>
           </a:p>
@@ -8488,7 +8675,9 @@
           <a:bodyPr rtlCol="0" anchor="ctr"/>
           <a:lstStyle/>
           <a:p>
-            <a:pPr algn="ctr"/>
+            <a:pPr algn="ctr">
+              <a:defRPr/>
+            </a:pPr>
           </a:p>
         </p:txBody>
       </p:sp>
@@ -8533,7 +8722,9 @@
           <a:bodyPr rtlCol="0" anchor="ctr"/>
           <a:lstStyle/>
           <a:p>
-            <a:pPr algn="ctr"/>
+            <a:pPr algn="ctr">
+              <a:defRPr/>
+            </a:pPr>
           </a:p>
         </p:txBody>
       </p:sp>
@@ -8568,10 +8759,12 @@
               </a:defRPr>
             </a:pPr>
             <a:r>
+              <a:rPr/>
               <a:t>PNAS 2026: AIを使った群は、使わない群より確証バイアスが強くなった</a:t>
             </a:r>
             <a:br/>
             <a:r>
+              <a:rPr/>
               <a:t>→ 「疑う力」を意識的に鍛える必要がある</a:t>
             </a:r>
           </a:p>
@@ -8612,7 +8805,7 @@
         <p:spPr>
           <a:xfrm>
             <a:off x="457200" y="274320"/>
-            <a:ext cx="8229600" cy="457200"/>
+            <a:ext cx="8229600" cy="484632"/>
           </a:xfrm>
           <a:prstGeom prst="rect">
             <a:avLst/>
@@ -8634,6 +8827,7 @@
               </a:defRPr>
             </a:pPr>
             <a:r>
+              <a:rPr/>
               <a:t>AI活用の3つのルール</a:t>
             </a:r>
           </a:p>
@@ -8678,7 +8872,9 @@
           <a:bodyPr rtlCol="0" anchor="ctr"/>
           <a:lstStyle/>
           <a:p>
-            <a:pPr algn="ctr"/>
+            <a:pPr algn="ctr">
+              <a:defRPr/>
+            </a:pPr>
           </a:p>
         </p:txBody>
       </p:sp>
@@ -8721,7 +8917,9 @@
           <a:bodyPr rtlCol="0" anchor="ctr"/>
           <a:lstStyle/>
           <a:p>
-            <a:pPr algn="ctr"/>
+            <a:pPr algn="ctr">
+              <a:defRPr/>
+            </a:pPr>
           </a:p>
         </p:txBody>
       </p:sp>
@@ -8756,6 +8954,7 @@
               </a:defRPr>
             </a:pPr>
             <a:r>
+              <a:rPr/>
               <a:t>1</a:t>
             </a:r>
           </a:p>
@@ -8770,7 +8969,7 @@
         <p:spPr>
           <a:xfrm>
             <a:off x="1828800" y="1143000"/>
-            <a:ext cx="6858000" cy="365760"/>
+            <a:ext cx="6858000" cy="375920"/>
           </a:xfrm>
           <a:prstGeom prst="rect">
             <a:avLst/>
@@ -8792,6 +8991,7 @@
               </a:defRPr>
             </a:pPr>
             <a:r>
+              <a:rPr/>
               <a:t>まず自分で考える</a:t>
             </a:r>
           </a:p>
@@ -8828,10 +9028,12 @@
               </a:defRPr>
             </a:pPr>
             <a:r>
+              <a:rPr/>
               <a:t>鑑別を3つ挙げてからAIに聞く</a:t>
             </a:r>
             <a:br/>
             <a:r>
+              <a:rPr/>
               <a:t>→ アンカリングを防ぐ</a:t>
             </a:r>
           </a:p>
@@ -8876,7 +9078,9 @@
           <a:bodyPr rtlCol="0" anchor="ctr"/>
           <a:lstStyle/>
           <a:p>
-            <a:pPr algn="ctr"/>
+            <a:pPr algn="ctr">
+              <a:defRPr/>
+            </a:pPr>
           </a:p>
         </p:txBody>
       </p:sp>
@@ -8911,6 +9115,7 @@
               </a:defRPr>
             </a:pPr>
             <a:r>
+              <a:rPr/>
               <a:t>2</a:t>
             </a:r>
           </a:p>
@@ -8925,7 +9130,7 @@
         <p:spPr>
           <a:xfrm>
             <a:off x="1828800" y="2331720"/>
-            <a:ext cx="6858000" cy="365760"/>
+            <a:ext cx="6858000" cy="375920"/>
           </a:xfrm>
           <a:prstGeom prst="rect">
             <a:avLst/>
@@ -8947,6 +9152,7 @@
               </a:defRPr>
             </a:pPr>
             <a:r>
+              <a:rPr/>
               <a:t>AIの答えを疑う</a:t>
             </a:r>
           </a:p>
@@ -8983,10 +9189,12 @@
               </a:defRPr>
             </a:pPr>
             <a:r>
+              <a:rPr/>
               <a:t>「AIが言ったから」を理由にしない</a:t>
             </a:r>
             <a:br/>
             <a:r>
+              <a:rPr/>
               <a:t>→ 反証を探すルーチン</a:t>
             </a:r>
           </a:p>
@@ -9031,7 +9239,9 @@
           <a:bodyPr rtlCol="0" anchor="ctr"/>
           <a:lstStyle/>
           <a:p>
-            <a:pPr algn="ctr"/>
+            <a:pPr algn="ctr">
+              <a:defRPr/>
+            </a:pPr>
           </a:p>
         </p:txBody>
       </p:sp>
@@ -9066,6 +9276,7 @@
               </a:defRPr>
             </a:pPr>
             <a:r>
+              <a:rPr/>
               <a:t>3</a:t>
             </a:r>
           </a:p>
@@ -9080,7 +9291,7 @@
         <p:spPr>
           <a:xfrm>
             <a:off x="1828800" y="3520439"/>
-            <a:ext cx="6858000" cy="365760"/>
+            <a:ext cx="6858000" cy="375920"/>
           </a:xfrm>
           <a:prstGeom prst="rect">
             <a:avLst/>
@@ -9102,6 +9313,7 @@
               </a:defRPr>
             </a:pPr>
             <a:r>
+              <a:rPr/>
               <a:t>使った過程を記録する</a:t>
             </a:r>
           </a:p>
@@ -9138,10 +9350,12 @@
               </a:defRPr>
             </a:pPr>
             <a:r>
+              <a:rPr/>
               <a:t>どの場面でAIを使い、どう判断したか</a:t>
             </a:r>
             <a:br/>
             <a:r>
+              <a:rPr/>
               <a:t>→ ポートフォリオに活かせる</a:t>
             </a:r>
           </a:p>
